--- a/decks/combined-cells/combined-cells_ch1_microscopes-and-magnification.pptx
+++ b/decks/combined-cells/combined-cells_ch1_microscopes-and-magnification.pptx
@@ -124,30 +124,30 @@
   <p:extLst>
     <p:ext uri="{521415D9-36F7-43E2-AB2F-B90AF26B5E84}">
       <p14:sectionLst xmlns:p14="http://schemas.microsoft.com/office/powerpoint/2010/main">
-        <p14:section name="Opening" id="{6051f4c5-c126-11dd-fd18-5c0d97b73e0a}">
+        <p14:section name="Opening" id="{c89a4f81-18eb-b4e2-46fa-7fe8f9a6519f}">
           <p14:sldIdLst>
             <p14:sldId id="256"/>
           </p14:sldIdLst>
         </p14:section>
-        <p14:section name="Gate" id="{3b802d93-b8b2-31aa-6675-52855936c18f}">
+        <p14:section name="Gate" id="{40d4653f-6790-198b-d516-b22db06364dc}">
           <p14:sldIdLst>
             <p14:sldId id="257"/>
             <p14:sldId id="258"/>
           </p14:sldIdLst>
         </p14:section>
-        <p14:section name="Pre-teach" id="{b4d59e3c-a795-6a8f-4969-c9a64747be2d}">
+        <p14:section name="Pre-teach" id="{e2864790-c755-5080-1bb3-7223f28ef8db}">
           <p14:sldIdLst>
             <p14:sldId id="259"/>
             <p14:sldId id="260"/>
           </p14:sldIdLst>
         </p14:section>
-        <p14:section name="Read-along" id="{148125f4-0f22-0a11-1e97-20c9a237c4be}">
+        <p14:section name="Read-along" id="{1d16da2b-3bda-61c8-f712-0633de49ae1f}">
           <p14:sldIdLst>
             <p14:sldId id="261"/>
             <p14:sldId id="262"/>
           </p14:sldIdLst>
         </p14:section>
-        <p14:section name="Teach" id="{8a43d0a0-c15c-d457-c986-eb0ca6314a81}">
+        <p14:section name="Teach" id="{44a31ead-ab92-04e9-2244-99043f0d21d4}">
           <p14:sldIdLst>
             <p14:sldId id="263"/>
             <p14:sldId id="264"/>
@@ -156,18 +156,18 @@
             <p14:sldId id="267"/>
           </p14:sldIdLst>
         </p14:section>
-        <p14:section name="Routes" id="{40be2ae6-2499-a0db-b07c-e87cc7ffffaa}">
+        <p14:section name="Routes" id="{2bbd549f-691d-ea3b-d56e-640f819dbb29}">
           <p14:sldIdLst>
             <p14:sldId id="268"/>
             <p14:sldId id="269"/>
           </p14:sldIdLst>
         </p14:section>
-        <p14:section name="Close" id="{33e89a3c-344a-8654-aa5b-614ff45095c1}">
+        <p14:section name="Close" id="{8e23eb17-f913-8307-b5bb-eaa91e2ae52f}">
           <p14:sldIdLst>
             <p14:sldId id="270"/>
           </p14:sldIdLst>
         </p14:section>
-        <p14:section name="Answers" id="{015e8b8d-8568-0c80-b724-cb1dadca33fd}">
+        <p14:section name="Answers" id="{34c50ad7-29a9-c4f0-01d2-154241373818}">
           <p14:sldIdLst>
             <p14:sldId id="271"/>
             <p14:sldId id="272"/>
@@ -1504,7 +1504,7 @@
               <a:rPr lang="en-US" dirty="0"/>
               <a:t>Do now — retrieval. Silent, no notes, no help: recall comes before any support. Give about four minutes.
 1. A drawing of a cell is 30 mm wide. The real cell is 0.2 mm wide. Calculate the magnification of the drawing.  →  150 ×
-2. How many micrometres are there in 1 mm?  →  C   1000 µm
+2. How many micrometres are there in 1 mm?  →  A   1000 µm
 3. Resolution is the ability to tell two points apart as ___ structures.  →  separate
 Circulate: who gets 3/3 (Stretch route), 2/3 (Core), 0–1 (Support)? Use this to route pupils later in the lesson.</a:t>
             </a:r>
@@ -1596,7 +1596,7 @@
               <a:rPr lang="en-US" dirty="0"/>
               <a:t>Answers — pupils mark their own in a different colour, then hands up for 3/3, 2/3, 1/3.
 1. 150 ×. Magnification = image size ÷ real size = 30 ÷ 0.2 = ×150 (exact, both sizes already in mm).
-2. C   1000 µm. 1 mm = 1000 µm. Micrometres are a thousand times smaller than millimetres, so there are a thousand of them in one millimetre.
+2. A   1000 µm. 1 mm = 1000 µm. Micrometres are a thousand times smaller than millimetres, so there are a thousand of them in one millimetre.
 3. separate. Resolution (resolving power) is about seeing two close points as two separate things. It is not the same as magnification.
 Say the route each score points to: 3/3 Stretch, 2/3 Core, 0–1 Support. Pupils may choose to move up.</a:t>
             </a:r>
@@ -10797,7 +10797,7 @@
                 <a:ea typeface="Calibri" pitchFamily="34" charset="-122"/>
                 <a:cs typeface="Calibri" pitchFamily="34" charset="-120"/>
               </a:rPr>
-              <a:t>10 µm</a:t>
+              <a:t>1000 µm</a:t>
             </a:r>
             <a:endParaRPr lang="en-US" sz="2400" dirty="0"/>
           </a:p>
@@ -10871,7 +10871,7 @@
                 <a:ea typeface="Calibri" pitchFamily="34" charset="-122"/>
                 <a:cs typeface="Calibri" pitchFamily="34" charset="-120"/>
               </a:rPr>
-              <a:t>1000 µm</a:t>
+              <a:t>10 µm</a:t>
             </a:r>
             <a:endParaRPr lang="en-US" sz="2400" dirty="0"/>
           </a:p>
@@ -11757,7 +11757,7 @@
                 <a:ea typeface="Calibri" pitchFamily="34" charset="-122"/>
                 <a:cs typeface="Calibri" pitchFamily="34" charset="-120"/>
               </a:rPr>
-              <a:t>C   1000 µm</a:t>
+              <a:t>A   1000 µm</a:t>
             </a:r>
             <a:endParaRPr lang="en-US" sz="2200" dirty="0"/>
           </a:p>

--- a/decks/combined-cells/combined-cells_ch1_microscopes-and-magnification.pptx
+++ b/decks/combined-cells/combined-cells_ch1_microscopes-and-magnification.pptx
@@ -124,30 +124,30 @@
   <p:extLst>
     <p:ext uri="{521415D9-36F7-43E2-AB2F-B90AF26B5E84}">
       <p14:sectionLst xmlns:p14="http://schemas.microsoft.com/office/powerpoint/2010/main">
-        <p14:section name="Opening" id="{c89a4f81-18eb-b4e2-46fa-7fe8f9a6519f}">
+        <p14:section name="Opening" id="{5e177b79-7ee2-f7cf-8f4d-340c95e365c5}">
           <p14:sldIdLst>
             <p14:sldId id="256"/>
           </p14:sldIdLst>
         </p14:section>
-        <p14:section name="Gate" id="{40d4653f-6790-198b-d516-b22db06364dc}">
+        <p14:section name="Gate" id="{8d3e9da4-220d-a563-94d2-7ba5f26e1ab8}">
           <p14:sldIdLst>
             <p14:sldId id="257"/>
             <p14:sldId id="258"/>
           </p14:sldIdLst>
         </p14:section>
-        <p14:section name="Pre-teach" id="{e2864790-c755-5080-1bb3-7223f28ef8db}">
+        <p14:section name="Pre-teach" id="{2bf5be5c-b379-46c2-c748-f8ba121ba695}">
           <p14:sldIdLst>
             <p14:sldId id="259"/>
             <p14:sldId id="260"/>
           </p14:sldIdLst>
         </p14:section>
-        <p14:section name="Read-along" id="{1d16da2b-3bda-61c8-f712-0633de49ae1f}">
+        <p14:section name="Read-along" id="{a5ab2d31-6a40-3123-893c-69b61641b0b7}">
           <p14:sldIdLst>
             <p14:sldId id="261"/>
             <p14:sldId id="262"/>
           </p14:sldIdLst>
         </p14:section>
-        <p14:section name="Teach" id="{44a31ead-ab92-04e9-2244-99043f0d21d4}">
+        <p14:section name="Teach" id="{6133c3ef-859e-818f-2da2-efc64ba2755b}">
           <p14:sldIdLst>
             <p14:sldId id="263"/>
             <p14:sldId id="264"/>
@@ -156,18 +156,18 @@
             <p14:sldId id="267"/>
           </p14:sldIdLst>
         </p14:section>
-        <p14:section name="Routes" id="{2bbd549f-691d-ea3b-d56e-640f819dbb29}">
+        <p14:section name="Routes" id="{520644de-cab9-a033-580f-573b869be3a6}">
           <p14:sldIdLst>
             <p14:sldId id="268"/>
             <p14:sldId id="269"/>
           </p14:sldIdLst>
         </p14:section>
-        <p14:section name="Close" id="{8e23eb17-f913-8307-b5bb-eaa91e2ae52f}">
+        <p14:section name="Close" id="{a6cfad3e-6d15-4cc9-d8e5-3c1074719fed}">
           <p14:sldIdLst>
             <p14:sldId id="270"/>
           </p14:sldIdLst>
         </p14:section>
-        <p14:section name="Answers" id="{34c50ad7-29a9-c4f0-01d2-154241373818}">
+        <p14:section name="Answers" id="{3f623077-b347-6f44-9fa3-b26eb22d0c02}">
           <p14:sldIdLst>
             <p14:sldId id="271"/>
             <p14:sldId id="272"/>
